--- a/Projects 4 & 11 Week/Project 2 - EV Charging Infrastructure Intelligence - Power BI Project - Week 11/EV_Charging_Infrastructure_Dashboard_Academic_Theme_Times_New_Roman.pptx
+++ b/Projects 4 & 11 Week/Project 2 - EV Charging Infrastructure Intelligence - Power BI Project - Week 11/EV_Charging_Infrastructure_Dashboard_Academic_Theme_Times_New_Roman.pptx
@@ -317,7 +317,7 @@
           <a:p>
             <a:fld id="{5BCAD085-E8A6-8845-BD4E-CB4CCA059FC4}" type="datetimeFigureOut">
               <a:rPr lang="en-US" smtClean="0"/>
-              <a:t>8/11/2026</a:t>
+              <a:t>8/12/2026</a:t>
             </a:fld>
             <a:endParaRPr lang="en-US"/>
           </a:p>
@@ -485,7 +485,7 @@
           <a:p>
             <a:fld id="{5BCAD085-E8A6-8845-BD4E-CB4CCA059FC4}" type="datetimeFigureOut">
               <a:rPr lang="en-US" smtClean="0"/>
-              <a:t>8/11/2026</a:t>
+              <a:t>8/12/2026</a:t>
             </a:fld>
             <a:endParaRPr lang="en-US"/>
           </a:p>
@@ -663,7 +663,7 @@
           <a:p>
             <a:fld id="{5BCAD085-E8A6-8845-BD4E-CB4CCA059FC4}" type="datetimeFigureOut">
               <a:rPr lang="en-US" smtClean="0"/>
-              <a:t>8/11/2026</a:t>
+              <a:t>8/12/2026</a:t>
             </a:fld>
             <a:endParaRPr lang="en-US"/>
           </a:p>
@@ -831,7 +831,7 @@
           <a:p>
             <a:fld id="{5BCAD085-E8A6-8845-BD4E-CB4CCA059FC4}" type="datetimeFigureOut">
               <a:rPr lang="en-US" smtClean="0"/>
-              <a:t>8/11/2026</a:t>
+              <a:t>8/12/2026</a:t>
             </a:fld>
             <a:endParaRPr lang="en-US"/>
           </a:p>
@@ -1076,7 +1076,7 @@
           <a:p>
             <a:fld id="{5BCAD085-E8A6-8845-BD4E-CB4CCA059FC4}" type="datetimeFigureOut">
               <a:rPr lang="en-US" smtClean="0"/>
-              <a:t>8/11/2026</a:t>
+              <a:t>8/12/2026</a:t>
             </a:fld>
             <a:endParaRPr lang="en-US"/>
           </a:p>
@@ -1361,7 +1361,7 @@
           <a:p>
             <a:fld id="{5BCAD085-E8A6-8845-BD4E-CB4CCA059FC4}" type="datetimeFigureOut">
               <a:rPr lang="en-US" smtClean="0"/>
-              <a:t>8/11/2026</a:t>
+              <a:t>8/12/2026</a:t>
             </a:fld>
             <a:endParaRPr lang="en-US"/>
           </a:p>
@@ -1780,7 +1780,7 @@
           <a:p>
             <a:fld id="{5BCAD085-E8A6-8845-BD4E-CB4CCA059FC4}" type="datetimeFigureOut">
               <a:rPr lang="en-US" smtClean="0"/>
-              <a:t>8/11/2026</a:t>
+              <a:t>8/12/2026</a:t>
             </a:fld>
             <a:endParaRPr lang="en-US"/>
           </a:p>
@@ -1897,7 +1897,7 @@
           <a:p>
             <a:fld id="{5BCAD085-E8A6-8845-BD4E-CB4CCA059FC4}" type="datetimeFigureOut">
               <a:rPr lang="en-US" smtClean="0"/>
-              <a:t>8/11/2026</a:t>
+              <a:t>8/12/2026</a:t>
             </a:fld>
             <a:endParaRPr lang="en-US"/>
           </a:p>
@@ -1992,7 +1992,7 @@
           <a:p>
             <a:fld id="{5BCAD085-E8A6-8845-BD4E-CB4CCA059FC4}" type="datetimeFigureOut">
               <a:rPr lang="en-US" smtClean="0"/>
-              <a:t>8/11/2026</a:t>
+              <a:t>8/12/2026</a:t>
             </a:fld>
             <a:endParaRPr lang="en-US"/>
           </a:p>
@@ -2267,7 +2267,7 @@
           <a:p>
             <a:fld id="{5BCAD085-E8A6-8845-BD4E-CB4CCA059FC4}" type="datetimeFigureOut">
               <a:rPr lang="en-US" smtClean="0"/>
-              <a:t>8/11/2026</a:t>
+              <a:t>8/12/2026</a:t>
             </a:fld>
             <a:endParaRPr lang="en-US"/>
           </a:p>
@@ -2519,7 +2519,7 @@
           <a:p>
             <a:fld id="{5BCAD085-E8A6-8845-BD4E-CB4CCA059FC4}" type="datetimeFigureOut">
               <a:rPr lang="en-US" smtClean="0"/>
-              <a:t>8/11/2026</a:t>
+              <a:t>8/12/2026</a:t>
             </a:fld>
             <a:endParaRPr lang="en-US"/>
           </a:p>
@@ -2730,7 +2730,7 @@
           <a:p>
             <a:fld id="{5BCAD085-E8A6-8845-BD4E-CB4CCA059FC4}" type="datetimeFigureOut">
               <a:rPr lang="en-US" smtClean="0"/>
-              <a:t>8/11/2026</a:t>
+              <a:t>8/12/2026</a:t>
             </a:fld>
             <a:endParaRPr lang="en-US"/>
           </a:p>
@@ -3448,16 +3448,16 @@
         </p:nvSpPr>
         <p:spPr>
           <a:xfrm>
-            <a:off x="914400" y="3680460"/>
-            <a:ext cx="10332720" cy="822960"/>
-          </a:xfrm>
-          <a:prstGeom prst="rect">
-            <a:avLst/>
-          </a:prstGeom>
-          <a:noFill/>
-        </p:spPr>
-        <p:txBody>
-          <a:bodyPr wrap="none">
+            <a:off x="2807208" y="3717488"/>
+            <a:ext cx="6574536" cy="677108"/>
+          </a:xfrm>
+          <a:prstGeom prst="rect">
+            <a:avLst/>
+          </a:prstGeom>
+          <a:noFill/>
+        </p:spPr>
+        <p:txBody>
+          <a:bodyPr wrap="square">
             <a:spAutoFit/>
           </a:bodyPr>
           <a:lstStyle/>
@@ -7751,6 +7751,7 @@
               </a:defRPr>
             </a:pPr>
             <a:r>
+              <a:rPr dirty="0"/>
               <a:t>Thank You</a:t>
             </a:r>
           </a:p>

--- a/Projects 4 & 11 Week/Project 2 - EV Charging Infrastructure Intelligence - Power BI Project - Week 11/EV_Charging_Infrastructure_Dashboard_Academic_Theme_Times_New_Roman.pptx
+++ b/Projects 4 & 11 Week/Project 2 - EV Charging Infrastructure Intelligence - Power BI Project - Week 11/EV_Charging_Infrastructure_Dashboard_Academic_Theme_Times_New_Roman.pptx
@@ -317,7 +317,7 @@
           <a:p>
             <a:fld id="{5BCAD085-E8A6-8845-BD4E-CB4CCA059FC4}" type="datetimeFigureOut">
               <a:rPr lang="en-US" smtClean="0"/>
-              <a:t>8/12/2026</a:t>
+              <a:t>8/13/2026</a:t>
             </a:fld>
             <a:endParaRPr lang="en-US"/>
           </a:p>
@@ -485,7 +485,7 @@
           <a:p>
             <a:fld id="{5BCAD085-E8A6-8845-BD4E-CB4CCA059FC4}" type="datetimeFigureOut">
               <a:rPr lang="en-US" smtClean="0"/>
-              <a:t>8/12/2026</a:t>
+              <a:t>8/13/2026</a:t>
             </a:fld>
             <a:endParaRPr lang="en-US"/>
           </a:p>
@@ -663,7 +663,7 @@
           <a:p>
             <a:fld id="{5BCAD085-E8A6-8845-BD4E-CB4CCA059FC4}" type="datetimeFigureOut">
               <a:rPr lang="en-US" smtClean="0"/>
-              <a:t>8/12/2026</a:t>
+              <a:t>8/13/2026</a:t>
             </a:fld>
             <a:endParaRPr lang="en-US"/>
           </a:p>
@@ -831,7 +831,7 @@
           <a:p>
             <a:fld id="{5BCAD085-E8A6-8845-BD4E-CB4CCA059FC4}" type="datetimeFigureOut">
               <a:rPr lang="en-US" smtClean="0"/>
-              <a:t>8/12/2026</a:t>
+              <a:t>8/13/2026</a:t>
             </a:fld>
             <a:endParaRPr lang="en-US"/>
           </a:p>
@@ -1076,7 +1076,7 @@
           <a:p>
             <a:fld id="{5BCAD085-E8A6-8845-BD4E-CB4CCA059FC4}" type="datetimeFigureOut">
               <a:rPr lang="en-US" smtClean="0"/>
-              <a:t>8/12/2026</a:t>
+              <a:t>8/13/2026</a:t>
             </a:fld>
             <a:endParaRPr lang="en-US"/>
           </a:p>
@@ -1361,7 +1361,7 @@
           <a:p>
             <a:fld id="{5BCAD085-E8A6-8845-BD4E-CB4CCA059FC4}" type="datetimeFigureOut">
               <a:rPr lang="en-US" smtClean="0"/>
-              <a:t>8/12/2026</a:t>
+              <a:t>8/13/2026</a:t>
             </a:fld>
             <a:endParaRPr lang="en-US"/>
           </a:p>
@@ -1780,7 +1780,7 @@
           <a:p>
             <a:fld id="{5BCAD085-E8A6-8845-BD4E-CB4CCA059FC4}" type="datetimeFigureOut">
               <a:rPr lang="en-US" smtClean="0"/>
-              <a:t>8/12/2026</a:t>
+              <a:t>8/13/2026</a:t>
             </a:fld>
             <a:endParaRPr lang="en-US"/>
           </a:p>
@@ -1897,7 +1897,7 @@
           <a:p>
             <a:fld id="{5BCAD085-E8A6-8845-BD4E-CB4CCA059FC4}" type="datetimeFigureOut">
               <a:rPr lang="en-US" smtClean="0"/>
-              <a:t>8/12/2026</a:t>
+              <a:t>8/13/2026</a:t>
             </a:fld>
             <a:endParaRPr lang="en-US"/>
           </a:p>
@@ -1992,7 +1992,7 @@
           <a:p>
             <a:fld id="{5BCAD085-E8A6-8845-BD4E-CB4CCA059FC4}" type="datetimeFigureOut">
               <a:rPr lang="en-US" smtClean="0"/>
-              <a:t>8/12/2026</a:t>
+              <a:t>8/13/2026</a:t>
             </a:fld>
             <a:endParaRPr lang="en-US"/>
           </a:p>
@@ -2267,7 +2267,7 @@
           <a:p>
             <a:fld id="{5BCAD085-E8A6-8845-BD4E-CB4CCA059FC4}" type="datetimeFigureOut">
               <a:rPr lang="en-US" smtClean="0"/>
-              <a:t>8/12/2026</a:t>
+              <a:t>8/13/2026</a:t>
             </a:fld>
             <a:endParaRPr lang="en-US"/>
           </a:p>
@@ -2519,7 +2519,7 @@
           <a:p>
             <a:fld id="{5BCAD085-E8A6-8845-BD4E-CB4CCA059FC4}" type="datetimeFigureOut">
               <a:rPr lang="en-US" smtClean="0"/>
-              <a:t>8/12/2026</a:t>
+              <a:t>8/13/2026</a:t>
             </a:fld>
             <a:endParaRPr lang="en-US"/>
           </a:p>
@@ -2730,7 +2730,7 @@
           <a:p>
             <a:fld id="{5BCAD085-E8A6-8845-BD4E-CB4CCA059FC4}" type="datetimeFigureOut">
               <a:rPr lang="en-US" smtClean="0"/>
-              <a:t>8/12/2026</a:t>
+              <a:t>8/13/2026</a:t>
             </a:fld>
             <a:endParaRPr lang="en-US"/>
           </a:p>
@@ -3245,7 +3245,7 @@
         </p:nvSpPr>
         <p:spPr>
           <a:xfrm>
-            <a:off x="640080" y="502920"/>
+            <a:off x="-430721" y="438912"/>
             <a:ext cx="10881360" cy="594360"/>
           </a:xfrm>
           <a:prstGeom prst="rect">
@@ -3268,6 +3268,7 @@
               </a:defRPr>
             </a:pPr>
             <a:r>
+              <a:rPr dirty="0"/>
               <a:t>EV Charging Infrastructure Intelligence Dashboard</a:t>
             </a:r>
           </a:p>
@@ -3281,7 +3282,7 @@
         </p:nvSpPr>
         <p:spPr>
           <a:xfrm>
-            <a:off x="731520" y="1051560"/>
+            <a:off x="82296" y="1024580"/>
             <a:ext cx="10698480" cy="320040"/>
           </a:xfrm>
           <a:prstGeom prst="rect">
@@ -3304,6 +3305,7 @@
               </a:defRPr>
             </a:pPr>
             <a:r>
+              <a:rPr dirty="0"/>
               <a:t>Power BI Data Analytics Project</a:t>
             </a:r>
           </a:p>
@@ -3363,8 +3365,8 @@
         </p:nvSpPr>
         <p:spPr>
           <a:xfrm>
-            <a:off x="1463040" y="1965960"/>
-            <a:ext cx="9235440" cy="548640"/>
+            <a:off x="5094753" y="1965960"/>
+            <a:ext cx="1972014" cy="446276"/>
           </a:xfrm>
           <a:prstGeom prst="rect">
             <a:avLst/>
@@ -3386,6 +3388,7 @@
               </a:defRPr>
             </a:pPr>
             <a:r>
+              <a:rPr dirty="0"/>
               <a:t>Presented By –</a:t>
             </a:r>
           </a:p>
@@ -3526,6 +3529,36 @@
           </a:p>
         </p:txBody>
       </p:sp>
+      <p:pic>
+        <p:nvPicPr>
+          <p:cNvPr id="12" name="Picture 11" descr="Ev Charging Electric Vehicle Charging Station Icon">
+            <a:extLst>
+              <a:ext uri="{FF2B5EF4-FFF2-40B4-BE49-F238E27FC236}">
+                <a16:creationId xmlns:a16="http://schemas.microsoft.com/office/drawing/2014/main" id="{547553EB-B9C9-8C80-925F-A97342C93A0A}"/>
+              </a:ext>
+            </a:extLst>
+          </p:cNvPr>
+          <p:cNvPicPr>
+            <a:picLocks noChangeAspect="1"/>
+          </p:cNvPicPr>
+          <p:nvPr/>
+        </p:nvPicPr>
+        <p:blipFill>
+          <a:blip r:embed="rId2"/>
+          <a:stretch>
+            <a:fillRect/>
+          </a:stretch>
+        </p:blipFill>
+        <p:spPr>
+          <a:xfrm>
+            <a:off x="9867769" y="256032"/>
+            <a:ext cx="1165740" cy="1165740"/>
+          </a:xfrm>
+          <a:prstGeom prst="rect">
+            <a:avLst/>
+          </a:prstGeom>
+        </p:spPr>
+      </p:pic>
     </p:spTree>
   </p:cSld>
   <p:clrMapOvr>
